--- a/slides/decks/s06-transfusion-abo.pptx
+++ b/slides/decks/s06-transfusion-abo.pptx
@@ -134,19 +134,19 @@
   <p:extLst>
     <p:ext uri="{521415D9-36F7-43E2-AB2F-B90AF26B5E84}">
       <p14:sectionLst xmlns:p14="http://schemas.microsoft.com/office/powerpoint/2010/main">
-        <p14:section name="Opening" id="{48db726d-eb4b-55cc-6148-ab917ab8092b}">
+        <p14:section name="Opening" id="{271ee7a0-f7e5-8485-e7de-7439f56c2548}">
           <p14:sldIdLst>
             <p14:sldId id="256"/>
             <p14:sldId id="257"/>
           </p14:sldIdLst>
         </p14:section>
-        <p14:section name="Safe products" id="{a34c2e34-269c-8c3e-d488-31a896249bc3}">
+        <p14:section name="Safe products" id="{2d738eaa-aff2-5726-22b7-43bcabc5cab5}">
           <p14:sldIdLst>
             <p14:sldId id="258"/>
             <p14:sldId id="259"/>
           </p14:sldIdLst>
         </p14:section>
-        <p14:section name="Red cells and platelets" id="{b01da702-5b1b-fdcd-8a08-43c5cbda18c4}">
+        <p14:section name="Red cells and platelets" id="{c9f8e852-4857-280e-1da3-d07db81c5c6c}">
           <p14:sldIdLst>
             <p14:sldId id="260"/>
             <p14:sldId id="261"/>
@@ -154,7 +154,7 @@
             <p14:sldId id="263"/>
           </p14:sldIdLst>
         </p14:section>
-        <p14:section name="ABO-incompatible HCT" id="{c6a748f4-2b83-4fb1-ef6d-0cacac19bd68}">
+        <p14:section name="ABO-incompatible HCT" id="{c9fcc67f-4095-84ba-1d45-e8e42cbafe98}">
           <p14:sldIdLst>
             <p14:sldId id="264"/>
             <p14:sldId id="265"/>
@@ -165,12 +165,12 @@
             <p14:sldId id="270"/>
           </p14:sldIdLst>
         </p14:section>
-        <p14:section name="Granulocytes" id="{872fef93-fb48-d216-c2b1-f1bf9d03d432}">
+        <p14:section name="Granulocytes" id="{3922d190-2200-6ed1-18ac-ca02494dadd5}">
           <p14:sldIdLst>
             <p14:sldId id="271"/>
           </p14:sldIdLst>
         </p14:section>
-        <p14:section name="Board questions" id="{0ddfad18-5e3d-93ba-8e2b-b7a07192a054}">
+        <p14:section name="Board questions" id="{3f82114d-7b51-d439-9432-0efd031a5538}">
           <p14:sldIdLst>
             <p14:sldId id="272"/>
             <p14:sldId id="273"/>
@@ -180,14 +180,14 @@
             <p14:sldId id="277"/>
           </p14:sldIdLst>
         </p14:section>
-        <p14:section name="References" id="{1cfbc1ac-997c-e643-0a2c-058ddc30c6a1}">
+        <p14:section name="References" id="{8d8b5bbe-76d6-a639-3b76-d34f8a14e444}">
           <p14:sldIdLst>
             <p14:sldId id="278"/>
             <p14:sldId id="279"/>
             <p14:sldId id="280"/>
           </p14:sldIdLst>
         </p14:section>
-        <p14:section name="Backup" id="{ce8a4d2a-eb16-7a0f-fe66-11a47746c862}">
+        <p14:section name="Backup" id="{68099beb-af27-adce-9741-19b12c76d1a0}">
           <p14:sldIdLst>
             <p14:sldId id="281"/>
             <p14:sldId id="282"/>
@@ -761,6 +761,17 @@
             </a:pPr>
             <a:r>
               <a:rPr lang="en-US" dirty="0"/>
+              <a:t>Titre 是倍數稀釋，所以 ≥ 32 和 ≤ 16 剛好把所有情況分成兩邊，minor 的 ≥ 1:256 和 ≤ 128 也一樣，這是講者的整理。Graft 處理在採集之後、輸注之前完成，所以移植前就要驗好病人和 donor 的 titre。</a:t>
+            </a:r>
+          </a:p>
+          <a:p>
+            <a:pPr>
+              <a:spcAft>
+                <a:spcPts val="600"/>
+              </a:spcAft>
+            </a:pPr>
+            <a:r>
+              <a:rPr lang="en-US" dirty="0"/>
               <a:t>做法在第 19 章。紅血球移除通常只用在 bone marrow，可以用 apheresis 機器或血袋離心取 buffy coat；小於 125 mL 的小 graft 用 Ficoll density gradient，移除得更徹底。不要的 isoagglutinin 則用洗滌的方式去除。Graft manipulation 的其他內容在第 7 堂。</a:t>
             </a:r>
           </a:p>
@@ -911,6 +922,17 @@
               <a:t>PRCA 如果沒有自己緩解，anti-donor isoagglutinin 又一直存在，書上列了三類處理方向：移除抗體、減少抗體製造、或刺激紅血球生成。第 24 章沒有指定單一方案。</a:t>
             </a:r>
           </a:p>
+          <a:p>
+            <a:pPr>
+              <a:spcAft>
+                <a:spcPts val="600"/>
+              </a:spcAft>
+            </a:pPr>
+            <a:r>
+              <a:rPr lang="en-US" dirty="0"/>
+              <a:t>延遲性溶血要等 donor B 細胞開始製造抗體才會出現，所以不在輸注當下，而是移植後一段時間才發生，這和輸注 graft 時紅血球不合造成的溶血不同。</a:t>
+            </a:r>
+          </a:p>
         </p:txBody>
       </p:sp>
       <p:sp>
@@ -1044,6 +1066,17 @@
             </a:pPr>
             <a:r>
               <a:rPr lang="en-US" dirty="0"/>
+              <a:t>Phase II 從 conditioning 開始算，所以 conditioning 第一天起，血品就要改成照 Table 24.1 選，不能再只看病人血型。</a:t>
+            </a:r>
+          </a:p>
+          <a:p>
+            <a:pPr>
+              <a:spcAft>
+                <a:spcPts val="600"/>
+              </a:spcAft>
+            </a:pPr>
+            <a:r>
+              <a:rPr lang="en-US" dirty="0"/>
               <a:t>接下來兩張是 Table 24.1 的內容。</a:t>
             </a:r>
           </a:p>
@@ -1191,6 +1224,17 @@
             </a:pPr>
             <a:r>
               <a:rPr lang="en-US" dirty="0"/>
+              <a:t>背法可以這樣想。Major mismatch 的紅血球跟著病人，血漿跟著 donor；donor 是 AB 時，血漿只有 AB 一種選擇。A 型病人接受 AB graft，血小板第二選擇是 A、B、O；B 型病人接受 AB graft 則是 B、A、O，病人的血型總是排在前面。</a:t>
+            </a:r>
+          </a:p>
+          <a:p>
+            <a:pPr>
+              <a:spcAft>
+                <a:spcPts val="600"/>
+              </a:spcAft>
+            </a:pPr>
+            <a:r>
+              <a:rPr lang="en-US" dirty="0"/>
               <a:t>血小板第二選擇常常列了三種，排在越前面越好，這是因為血小板不一定拿得到理想血型。考試常拿 O 給 A 這一列出題。</a:t>
             </a:r>
           </a:p>
@@ -1305,6 +1349,17 @@
             </a:pPr>
             <a:r>
               <a:rPr lang="en-US" dirty="0"/>
+              <a:t>Minor mismatch 怕的是 donor 的抗體，所以血漿和血小板配合病人，避免再輸進攻擊病人紅血球的抗體。紅血球選 O，是因為 donor 的 anti-A 會攻擊 A 型紅血球，engraftment 之後由 donor B 細胞製造的抗體也一樣。</a:t>
+            </a:r>
+          </a:p>
+          <a:p>
+            <a:pPr>
+              <a:spcAft>
+                <a:spcPts val="600"/>
+              </a:spcAft>
+            </a:pPr>
+            <a:r>
+              <a:rPr lang="en-US" dirty="0"/>
               <a:t>A 型病人接受 O 型 graft，紅血球用 O，血小板和血漿第一選擇是病人的 A 型，血漿第二選擇 AB。AB 型病人接受 A 型 graft，紅血球可以用 A 或 O，血漿用 AB。</a:t>
             </a:r>
           </a:p>
@@ -1455,6 +1510,17 @@
               <a:t>血小板常常拿不到理想的 ABO 血型。為了減少 isoagglutinin 造成的不良反應，可以排除帶高 titre ABO 抗體的 apheresis 捐血者，但書上更推薦的做法是 plasma-reduced 的血小板，懸浮在 platelet additive solution 裡，只留約 30% 血漿，apheresis 或 pooled 都可以這樣做。</a:t>
             </a:r>
           </a:p>
+          <a:p>
+            <a:pPr>
+              <a:spcAft>
+                <a:spcPts val="600"/>
+              </a:spcAft>
+            </a:pPr>
+            <a:r>
+              <a:rPr lang="en-US" dirty="0"/>
+              <a:t>病人 RhD 陰性、donor 陽性時，紅血球仍然維持 RhD 陰性，改的只有血小板，而且要等到 RhD 陽性紅血球真的出現。</a:t>
+            </a:r>
+          </a:p>
         </p:txBody>
       </p:sp>
       <p:sp>
@@ -1580,6 +1646,17 @@
               <a:t>副作用有發燒、寒顫、肺部反應和 alloimmunisation。整體 alloimmunisation 的風險不高，但它會影響血小板輸注的效果，也可能增加 graft failure。如果病人之後要做 unrelated HCT，要追蹤 HLA 抗體，找 donor 時把 donor-specific antibody 考慮進去。產品一定要照射，並來自 CMV 陰性的捐血者，最好再用 CMV PCR 確認，避開空窗期。</a:t>
             </a:r>
           </a:p>
+          <a:p>
+            <a:pPr>
+              <a:spcAft>
+                <a:spcPts val="600"/>
+              </a:spcAft>
+            </a:pPr>
+            <a:r>
+              <a:rPr lang="en-US" dirty="0"/>
+              <a:t>最佳的輸注次數目前不清楚。研究也顯示，alloimmunisation 並不影響存活、微生物反應、輸血反應或輸注後嗜中性球的上升。</a:t>
+            </a:r>
+          </a:p>
         </p:txBody>
       </p:sp>
       <p:sp>
@@ -1701,6 +1778,17 @@
               </a:spcAft>
             </a:pPr>
             <a:r>
+              <a:rPr lang="en-US" dirty="0"/>
+              <a:t>這題考的是 auto 和 allo 的差別。注意他還沒收集幹細胞，現在就需要輸血。</a:t>
+            </a:r>
+          </a:p>
+          <a:p>
+            <a:pPr>
+              <a:spcAft>
+                <a:spcPts val="600"/>
+              </a:spcAft>
+            </a:pPr>
+            <a:r>
               <a:rPr lang="en-US" b="1" dirty="0"/>
               <a:t>[Pause for answers.]</a:t>
             </a:r>
@@ -1819,6 +1907,17 @@
               <a:t>C 是 allo-HCT 的規則，最晚從 conditioning 開始，到至少六個月或免疫重建，是最主要的干擾選項。D 錯在 leukocyte reduction 不能取代照射。E 也錯，紅血球、血小板和 granulocyte 這些 cellular component 都要照射，劑量 25 到 50 Gy。</a:t>
             </a:r>
           </a:p>
+          <a:p>
+            <a:pPr>
+              <a:spcAft>
+                <a:spcPts val="600"/>
+              </a:spcAft>
+            </a:pPr>
+            <a:r>
+              <a:rPr lang="en-US" dirty="0"/>
+              <a:t>另外，donor 如果在採集前七天內或採集期間輸過血，那些血品也要照射，這是 allo 情境下的延伸考點。</a:t>
+            </a:r>
+          </a:p>
         </p:txBody>
       </p:sp>
       <p:sp>
@@ -1919,7 +2018,7 @@
             </a:pPr>
             <a:r>
               <a:rPr lang="en-US" dirty="0"/>
-              <a:t>第二題。45 歲女性，AML，unrelated donor allo-HCT 後 day 25。沒有發燒、沒有出血，也沒有脾臟腫大、SOS/VOD 或新加的藥。連續兩次輸新鮮、ABO 相同的血小板，1 小時 CCI 都低於 5000/µL，驗到 HLA class I 抗體。下一步最適當的是什麼。</a:t>
+              <a:t>第二題。45 歲女性，AML，allo-HCT 後 day 25。沒有發燒、沒有出血，也沒有脾臟腫大、SOS/VOD 或新加的藥。連續兩次輸新鮮、ABO 相同的血小板，1 小時 CCI 都低於 5000/µL，驗到 HLA class I 抗體。下一步最適當的是什麼。</a:t>
             </a:r>
           </a:p>
           <a:p>
@@ -1931,6 +2030,17 @@
             <a:r>
               <a:rPr lang="en-US" dirty="0"/>
               <a:t>選項有先驗 HPA、改給 HLA-matched apheresis 血小板、改高劑量、停止預防性輸注，以及改用 pooled 血小板。</a:t>
+            </a:r>
+          </a:p>
+          <a:p>
+            <a:pPr>
+              <a:spcAft>
+                <a:spcPts val="600"/>
+              </a:spcAft>
+            </a:pPr>
+            <a:r>
+              <a:rPr lang="en-US" dirty="0"/>
+              <a:t>請先確認她是否符合 refractoriness 的定義。題目已經把常見的非免疫原因都排除了。</a:t>
             </a:r>
           </a:p>
           <a:p>
@@ -2194,6 +2304,17 @@
               <a:t>A 是最主要的干擾選項。HPA 抗體要在 HLA-matched 血小板也無效之後才驗，順序不能反過來。C 錯在 PLADO 顯示劑量不影響出血，而且抗體問題不是劑量能解決的。D 錯在 allo-HCT 的標準仍是預防性輸注。E 的 pooled 血小板對已經 alloimmunised 的病人沒有優勢，apheresis 的好處正是可以配對。</a:t>
             </a:r>
           </a:p>
+          <a:p>
+            <a:pPr>
+              <a:spcAft>
+                <a:spcPts val="600"/>
+              </a:spcAft>
+            </a:pPr>
+            <a:r>
+              <a:rPr lang="en-US" dirty="0"/>
+              <a:t>找不到 HLA-matched 的 donor 時，可以選 permissive mismatch 或 antigen-negative 的血小板；都沒有時，才考慮自體冷凍血小板、rituximab、高劑量 IVIg 或 plasmapheresis。</a:t>
+            </a:r>
+          </a:p>
         </p:txBody>
       </p:sp>
       <p:sp>
@@ -2315,6 +2436,17 @@
               </a:spcAft>
             </a:pPr>
             <a:r>
+              <a:rPr lang="en-US" dirty="0"/>
+              <a:t>PBSC 和 bone marrow 的處理門檻不一樣，這點要留意。</a:t>
+            </a:r>
+          </a:p>
+          <a:p>
+            <a:pPr>
+              <a:spcAft>
+                <a:spcPts val="600"/>
+              </a:spcAft>
+            </a:pPr>
+            <a:r>
               <a:rPr lang="en-US" b="1" dirty="0"/>
               <a:t>[Pause for answers.]</a:t>
             </a:r>
@@ -2433,6 +2565,17 @@
               <a:t>A 錯在 PBSC 只有在 titre ≤ 16 時才不用處理。B 和 E 都屬於 minor mismatch，方向反了。D 的 A 型紅血球會被病人殘存的 anti-A 破壞。這位病人之後要注意 PRCA，O 型帶高 titre anti-A 接受 A 型 graft，正是風險最高的組合。</a:t>
             </a:r>
           </a:p>
+          <a:p>
+            <a:pPr>
+              <a:spcAft>
+                <a:spcPts val="600"/>
+              </a:spcAft>
+            </a:pPr>
+            <a:r>
+              <a:rPr lang="en-US" dirty="0"/>
+              <a:t>Phase I 也就是 conditioning 之前，所有血品都用病人的 O 型。</a:t>
+            </a:r>
+          </a:p>
         </p:txBody>
       </p:sp>
       <p:sp>
@@ -3108,6 +3251,17 @@
               <a:t>還有一個容易忽略的點。Donor 如果在採集前七天內或採集期間輸過血，那些血品也要照射。Auto 和 allo 的起訖時間不同，這組數字是這一章最常考的地方。</a:t>
             </a:r>
           </a:p>
+          <a:p>
+            <a:pPr>
+              <a:spcAft>
+                <a:spcPts val="600"/>
+              </a:spcAft>
+            </a:pPr>
+            <a:r>
+              <a:rPr lang="en-US" dirty="0"/>
+              <a:t>Auto 病人在 mobilisation 之前常常就需要輸血，這時就該開始用照射血品。</a:t>
+            </a:r>
+          </a:p>
         </p:txBody>
       </p:sp>
       <p:sp>
@@ -3233,6 +3387,17 @@
               <a:t>風險最高的捐血，來自剛剛轉為 CMV IgG 陽性的捐血者。目前沒有國際共識，CMV 陰性血品要給多久，各中心從 day 100 到終身都有。CMV 的監測和治療留到第 12 堂。</a:t>
             </a:r>
           </a:p>
+          <a:p>
+            <a:pPr>
+              <a:spcAft>
+                <a:spcPts val="600"/>
+              </a:spcAft>
+            </a:pPr>
+            <a:r>
+              <a:rPr lang="en-US" dirty="0"/>
+              <a:t>要注意，這裡寫的殘留白血球是 1 到 5 × 10⁶，比前一張移植血品要求的 1 × 10⁶ 寬鬆一些。</a:t>
+            </a:r>
+          </a:p>
         </p:txBody>
       </p:sp>
       <p:sp>
@@ -3369,6 +3534,17 @@
               <a:t>最後是血品的新鮮度。好幾個 trial 都看不到新鮮紅血球的好處，所以 AABB 建議在有效期限內的任何血品都可以用。</a:t>
             </a:r>
           </a:p>
+          <a:p>
+            <a:pPr>
+              <a:spcAft>
+                <a:spcPts val="600"/>
+              </a:spcAft>
+            </a:pPr>
+            <a:r>
+              <a:rPr lang="en-US" dirty="0"/>
+              <a:t>TRIST 的 70 g/L 換算就是 7 g/dL，和一般建議的門檻一致。</a:t>
+            </a:r>
+          </a:p>
         </p:txBody>
       </p:sp>
       <p:sp>
@@ -3505,6 +3681,17 @@
               <a:t>Key points 裡特別寫了一句，allo-HCT 病人的血小板低下，標準仍然是 prophylactic transfusion，不是等出血才輸。10 和 20 這兩個數字，以及哪些情況要升到 20，是典型的考點。下一張就說明為什麼 allo 不能只做 therapeutic transfusion。</a:t>
             </a:r>
           </a:p>
+          <a:p>
+            <a:pPr>
+              <a:spcAft>
+                <a:spcPts val="600"/>
+              </a:spcAft>
+            </a:pPr>
+            <a:r>
+              <a:rPr lang="en-US" dirty="0"/>
+              <a:t>例如 mucositis 加上發燒的病人，兩個條件都指向 20 × 10⁹/L。如果又出現 hemorrhagic cystitis 或 diffuse alveolar hemorrhage，就要依實際出血情況再往上調，書上沒有給固定的數字。</a:t>
+            </a:r>
+          </a:p>
         </p:txBody>
       </p:sp>
       <p:sp>
@@ -3641,6 +3828,17 @@
               <a:t>最後是產品種類。Apheresis 和 whole blood pooled 的血小板，對沒有 alloimmunisation 的病人效果相當；apheresis 的優勢只出現在帶 HLA 或 HPA 抗體、需要配對捐血者的病人。</a:t>
             </a:r>
           </a:p>
+          <a:p>
+            <a:pPr>
+              <a:spcAft>
+                <a:spcPts val="600"/>
+              </a:spcAft>
+            </a:pPr>
+            <a:r>
+              <a:rPr lang="en-US" dirty="0"/>
+              <a:t>所以在 1.1 到 4.4 × 10¹¹/m² 之間，多給並不會減少出血；therapeutic-only 的策略，目前只適合成人的 auto-PBSCT。</a:t>
+            </a:r>
+          </a:p>
         </p:txBody>
       </p:sp>
       <p:sp>
@@ -3777,6 +3975,17 @@
               <a:t>用了 HLA-matched 血小板還是升不上來，而且非免疫原因不太可能，才去驗 HPA 抗體。真的找不到相容的捐血者，可以用病人緩解期事先冷凍的自體血小板、rituximab、高劑量 IVIg 或 plasmapheresis。</a:t>
             </a:r>
           </a:p>
+          <a:p>
+            <a:pPr>
+              <a:spcAft>
+                <a:spcPts val="600"/>
+              </a:spcAft>
+            </a:pPr>
+            <a:r>
+              <a:rPr lang="en-US" dirty="0"/>
+              <a:t>HLA 抗體多半來自過去的輸血。第 24 章在 granulocyte 那一段也提到，alloimmunisation 會讓血小板輸注後的上升變差。如果病人在移植前就已經 refractory，可以趁緩解時先收集自體血小板冷凍起來，留到 allo-HCT 之後使用。</a:t>
+            </a:r>
+          </a:p>
         </p:txBody>
       </p:sp>
       <p:sp>
@@ -3900,6 +4109,17 @@
             <a:r>
               <a:rPr lang="en-US" dirty="0"/>
               <a:t>第 12 章提到，ABO 不合對整體結果的影響不大，而且這幾年越來越小，部分原因是 bone marrow graft 用得少了。兒科的 donor 選擇排序裡，ABO 排在很後面。不過用 PBSC 只能避開輸注 graft 時的問題，移植後的溶血、紅血球生成延遲和 PRCA 還是會發生。</a:t>
+            </a:r>
+          </a:p>
+          <a:p>
+            <a:pPr>
+              <a:spcAft>
+                <a:spcPts val="600"/>
+              </a:spcAft>
+            </a:pPr>
+            <a:r>
+              <a:rPr lang="en-US" dirty="0"/>
+              <a:t>第 12 章兒科 donor 選擇的排序裡，ABO major compatibility 排在 donor 性別之後，minor compatibility 更排在 donor center 位置之後，幾乎是最後一項。抗體方向這個概念，後面 graft 處理、併發症和輸血選擇都會一直用到。</a:t>
             </a:r>
           </a:p>
         </p:txBody>
@@ -11718,7 +11938,7 @@
                             <a:schemeClr val="tx1"/>
                           </a:solidFill>
                         </a:rPr>
-                        <a:t>RhD-negative unless donor and recipient are both RhD-positive</a:t>
+                        <a:t>RhD-negative unless donor and recipient both RhD-positive</a:t>
                       </a:r>
                       <a:endParaRPr lang="en-US" sz="1500" dirty="0"/>
                     </a:p>
@@ -11964,7 +12184,7 @@
                             <a:schemeClr val="tx1"/>
                           </a:solidFill>
                         </a:rPr>
-                        <a:t>Recipient-compatible until donor red cells appear, then graft</a:t>
+                        <a:t>Recipient-type until donor red cells appear, then graft-type</a:t>
                       </a:r>
                       <a:endParaRPr lang="en-US" sz="1500" dirty="0"/>
                     </a:p>
@@ -12046,7 +12266,7 @@
                             <a:schemeClr val="tx1"/>
                           </a:solidFill>
                         </a:rPr>
-                        <a:t>K-negative RBC unless both donor and recipient are K-positive</a:t>
+                        <a:t>K-negative RBC unless donor and recipient both K-positive</a:t>
                       </a:r>
                       <a:endParaRPr lang="en-US" sz="1500" dirty="0"/>
                     </a:p>
@@ -13926,7 +14146,7 @@
                   <a:schemeClr val="tx1"/>
                 </a:solidFill>
               </a:rPr>
-              <a:t>On day +25 after unrelated-donor allo-HCT for AML, a 45-year-old woman is afebrile, not bleeding, has no splenomegaly, SOS/VOD or new drugs. After two consecutive fresh, ABO-identical platelet transfusions, her 1-h corrected count increment was &lt; 5000/µL each time. HLA class I antibodies are detected. What is the best next step?</a:t>
+              <a:t>On day +25 after allo-HCT for AML, a 45-year-old woman is afebrile, not bleeding, has no splenomegaly, SOS/VOD or new drugs. After two consecutive fresh, ABO-identical platelet transfusions, her 1-h corrected count increment was &lt; 5000/µL each time. HLA class I antibodies are detected. What is the best next step?</a:t>
             </a:r>
             <a:endParaRPr lang="en-US" sz="1900" dirty="0"/>
           </a:p>
@@ -17430,7 +17650,7 @@
                             <a:schemeClr val="tx1"/>
                           </a:solidFill>
                         </a:rPr>
-                        <a:t>Permissive mismatch: cross-reactive groups or epitope algorithms</a:t>
+                        <a:t>20 kg, Hb 6 → 9: 3 × 4 × 20 = 240 mL (speaker's arithmetic)</a:t>
                       </a:r>
                       <a:endParaRPr lang="en-US" sz="1600" dirty="0"/>
                     </a:p>
@@ -17512,7 +17732,7 @@
                             <a:schemeClr val="tx1"/>
                           </a:solidFill>
                         </a:rPr>
-                        <a:t>Antigen-negative: lacks the targets of the recipient's HLA antibodies</a:t>
+                        <a:t>Liver iron not a strong OS factor (Armand 2014)</a:t>
                       </a:r>
                       <a:endParaRPr lang="en-US" sz="1600" dirty="0"/>
                     </a:p>

--- a/slides/decks/s06-transfusion-abo.pptx
+++ b/slides/decks/s06-transfusion-abo.pptx
@@ -134,19 +134,19 @@
   <p:extLst>
     <p:ext uri="{521415D9-36F7-43E2-AB2F-B90AF26B5E84}">
       <p14:sectionLst xmlns:p14="http://schemas.microsoft.com/office/powerpoint/2010/main">
-        <p14:section name="Opening" id="{271ee7a0-f7e5-8485-e7de-7439f56c2548}">
+        <p14:section name="Opening" id="{7428a759-51ab-93e3-2d01-b168c312f85d}">
           <p14:sldIdLst>
             <p14:sldId id="256"/>
             <p14:sldId id="257"/>
           </p14:sldIdLst>
         </p14:section>
-        <p14:section name="Safe products" id="{2d738eaa-aff2-5726-22b7-43bcabc5cab5}">
+        <p14:section name="Safe products" id="{d55343f2-7e5c-926e-1b7c-489942747076}">
           <p14:sldIdLst>
             <p14:sldId id="258"/>
             <p14:sldId id="259"/>
           </p14:sldIdLst>
         </p14:section>
-        <p14:section name="Red cells and platelets" id="{c9f8e852-4857-280e-1da3-d07db81c5c6c}">
+        <p14:section name="Red cells and platelets" id="{32d225d2-2558-0437-9da7-20016e49df80}">
           <p14:sldIdLst>
             <p14:sldId id="260"/>
             <p14:sldId id="261"/>
@@ -154,7 +154,7 @@
             <p14:sldId id="263"/>
           </p14:sldIdLst>
         </p14:section>
-        <p14:section name="ABO-incompatible HCT" id="{c9fcc67f-4095-84ba-1d45-e8e42cbafe98}">
+        <p14:section name="ABO-incompatible HCT" id="{98b93c85-a694-5e40-281d-3e1ef4020c2f}">
           <p14:sldIdLst>
             <p14:sldId id="264"/>
             <p14:sldId id="265"/>
@@ -165,12 +165,12 @@
             <p14:sldId id="270"/>
           </p14:sldIdLst>
         </p14:section>
-        <p14:section name="Granulocytes" id="{3922d190-2200-6ed1-18ac-ca02494dadd5}">
+        <p14:section name="Granulocytes" id="{5c31d5fd-0907-748a-0913-8bcb8728bbd0}">
           <p14:sldIdLst>
             <p14:sldId id="271"/>
           </p14:sldIdLst>
         </p14:section>
-        <p14:section name="Board questions" id="{3f82114d-7b51-d439-9432-0efd031a5538}">
+        <p14:section name="Board questions" id="{6b88044f-fceb-8604-5fd3-42f4239c70ed}">
           <p14:sldIdLst>
             <p14:sldId id="272"/>
             <p14:sldId id="273"/>
@@ -180,14 +180,14 @@
             <p14:sldId id="277"/>
           </p14:sldIdLst>
         </p14:section>
-        <p14:section name="References" id="{8d8b5bbe-76d6-a639-3b76-d34f8a14e444}">
+        <p14:section name="References" id="{fc69d633-31fd-16a7-0293-5e9543422559}">
           <p14:sldIdLst>
             <p14:sldId id="278"/>
             <p14:sldId id="279"/>
             <p14:sldId id="280"/>
           </p14:sldIdLst>
         </p14:section>
-        <p14:section name="Backup" id="{68099beb-af27-adce-9741-19b12c76d1a0}">
+        <p14:section name="Backup" id="{c9945459-9c36-330d-f822-524c99626317}">
           <p14:sldIdLst>
             <p14:sldId id="281"/>
             <p14:sldId id="282"/>
@@ -1203,6 +1203,17 @@
             <a:r>
               <a:rPr lang="en-US" dirty="0"/>
               <a:t>Donor 是 AB 型的時候，血漿和血小板第一選擇都是 AB，血漿沒有第二選擇。A 型病人接受 AB graft，紅血球可以用 A 或 O，排序在前的優先。</a:t>
+            </a:r>
+          </a:p>
+          <a:p>
+            <a:pPr>
+              <a:spcAft>
+                <a:spcPts val="600"/>
+              </a:spcAft>
+            </a:pPr>
+            <a:r>
+              <a:rPr lang="en-US" dirty="0"/>
+              <a:t>O 型病人接受 AB graft 這一列，紅血球仍然只能用 O，血小板和血漿都以 AB 為第一選擇。</a:t>
             </a:r>
           </a:p>
           <a:p>

--- a/slides/decks/s06-transfusion-abo.pptx
+++ b/slides/decks/s06-transfusion-abo.pptx
@@ -134,19 +134,19 @@
   <p:extLst>
     <p:ext uri="{521415D9-36F7-43E2-AB2F-B90AF26B5E84}">
       <p14:sectionLst xmlns:p14="http://schemas.microsoft.com/office/powerpoint/2010/main">
-        <p14:section name="Opening" id="{7428a759-51ab-93e3-2d01-b168c312f85d}">
+        <p14:section name="Opening" id="{680e034a-d1e5-bcce-3577-53d232e74757}">
           <p14:sldIdLst>
             <p14:sldId id="256"/>
             <p14:sldId id="257"/>
           </p14:sldIdLst>
         </p14:section>
-        <p14:section name="Safe products" id="{d55343f2-7e5c-926e-1b7c-489942747076}">
+        <p14:section name="Safe products" id="{bfb23125-a588-3516-1c06-99398064c644}">
           <p14:sldIdLst>
             <p14:sldId id="258"/>
             <p14:sldId id="259"/>
           </p14:sldIdLst>
         </p14:section>
-        <p14:section name="Red cells and platelets" id="{32d225d2-2558-0437-9da7-20016e49df80}">
+        <p14:section name="Red cells and platelets" id="{7ec79790-ebb9-7155-8084-ded657af89e4}">
           <p14:sldIdLst>
             <p14:sldId id="260"/>
             <p14:sldId id="261"/>
@@ -154,7 +154,7 @@
             <p14:sldId id="263"/>
           </p14:sldIdLst>
         </p14:section>
-        <p14:section name="ABO-incompatible HCT" id="{98b93c85-a694-5e40-281d-3e1ef4020c2f}">
+        <p14:section name="ABO-incompatible HCT" id="{f631fddc-d7af-b895-9b12-78942eb7c583}">
           <p14:sldIdLst>
             <p14:sldId id="264"/>
             <p14:sldId id="265"/>
@@ -165,12 +165,12 @@
             <p14:sldId id="270"/>
           </p14:sldIdLst>
         </p14:section>
-        <p14:section name="Granulocytes" id="{5c31d5fd-0907-748a-0913-8bcb8728bbd0}">
+        <p14:section name="Granulocytes" id="{c8c88a56-e4da-2ec6-33b7-8878b581d3aa}">
           <p14:sldIdLst>
             <p14:sldId id="271"/>
           </p14:sldIdLst>
         </p14:section>
-        <p14:section name="Board questions" id="{6b88044f-fceb-8604-5fd3-42f4239c70ed}">
+        <p14:section name="Board questions" id="{28761598-07bc-9631-b5ab-095bf3f6c322}">
           <p14:sldIdLst>
             <p14:sldId id="272"/>
             <p14:sldId id="273"/>
@@ -180,14 +180,14 @@
             <p14:sldId id="277"/>
           </p14:sldIdLst>
         </p14:section>
-        <p14:section name="References" id="{fc69d633-31fd-16a7-0293-5e9543422559}">
+        <p14:section name="References" id="{11027263-6ef1-4944-0788-73721e274a4b}">
           <p14:sldIdLst>
             <p14:sldId id="278"/>
             <p14:sldId id="279"/>
             <p14:sldId id="280"/>
           </p14:sldIdLst>
         </p14:section>
-        <p14:section name="Backup" id="{c9945459-9c36-330d-f822-524c99626317}">
+        <p14:section name="Backup" id="{7ca3bec1-81ad-1c0e-b349-658ca57cf78f}">
           <p14:sldIdLst>
             <p14:sldId id="281"/>
             <p14:sldId id="282"/>
@@ -16996,7 +16996,7 @@
                   <a:schemeClr val="tx1"/>
                 </a:solidFill>
               </a:rPr>
-              <a:t>BACKUP · BACKUP · PLATELET REFRACTORINESS</a:t>
+              <a:t>BACKUP · PLATELET REFRACTORINESS</a:t>
             </a:r>
             <a:endParaRPr lang="en-US" sz="1100" dirty="0"/>
           </a:p>
@@ -17240,7 +17240,7 @@
                   <a:schemeClr val="tx1"/>
                 </a:solidFill>
               </a:rPr>
-              <a:t>BACKUP · BACKUP · HLA-MATCHED PLATELETS</a:t>
+              <a:t>BACKUP · HLA-MATCHED PLATELETS</a:t>
             </a:r>
             <a:endParaRPr lang="en-US" sz="1100" dirty="0"/>
           </a:p>
@@ -17661,7 +17661,7 @@
                             <a:schemeClr val="tx1"/>
                           </a:solidFill>
                         </a:rPr>
-                        <a:t>20 kg, Hb 6 → 9: 3 × 4 × 20 = 240 mL (speaker's arithmetic)</a:t>
+                        <a:t>Permissive mismatch: cross-reactive groups, epitopes</a:t>
                       </a:r>
                       <a:endParaRPr lang="en-US" sz="1600" dirty="0"/>
                     </a:p>
@@ -17743,7 +17743,7 @@
                             <a:schemeClr val="tx1"/>
                           </a:solidFill>
                         </a:rPr>
-                        <a:t>Liver iron not a strong OS factor (Armand 2014)</a:t>
+                        <a:t>Antigen-negative for the recipient's HLA antibodies</a:t>
                       </a:r>
                       <a:endParaRPr lang="en-US" sz="1600" dirty="0"/>
                     </a:p>
@@ -17825,7 +17825,7 @@
                             <a:schemeClr val="tx1"/>
                           </a:solidFill>
                         </a:rPr>
-                        <a:t>HPA antibodies if refractoriness persists and non-immune causes unlikely</a:t>
+                        <a:t>HPA antibodies if still refractory, non-immune unlikely</a:t>
                       </a:r>
                       <a:endParaRPr lang="en-US" sz="1600" dirty="0"/>
                     </a:p>
@@ -17907,7 +17907,7 @@
                             <a:schemeClr val="tx1"/>
                           </a:solidFill>
                         </a:rPr>
-                        <a:t>Autologous cryopreserved PC, rituximab, high-dose IVIg, plasmapheresis</a:t>
+                        <a:t>Autologous frozen PC, rituximab, IVIg, plasmapheresis</a:t>
                       </a:r>
                       <a:endParaRPr lang="en-US" sz="1600" dirty="0"/>
                     </a:p>
@@ -18076,7 +18076,7 @@
                   <a:schemeClr val="tx1"/>
                 </a:solidFill>
               </a:rPr>
-              <a:t>BACKUP · BACKUP · RED CELL DOSE AND IRON</a:t>
+              <a:t>BACKUP · RED CELL DOSE AND IRON</a:t>
             </a:r>
             <a:endParaRPr lang="en-US" sz="1100" dirty="0"/>
           </a:p>
@@ -18497,7 +18497,7 @@
                             <a:schemeClr val="tx1"/>
                           </a:solidFill>
                         </a:rPr>
-                        <a:t>20 kg, Hb 6 → 9 g/dL: 3 × 4 × 20 = 240 mL (speaker's arithmetic)</a:t>
+                        <a:t>20 kg, Hb 6 → 9: 3 × 4 × 20 = 240 mL (speaker's arithmetic)</a:t>
                       </a:r>
                       <a:endParaRPr lang="en-US" sz="1600" dirty="0"/>
                     </a:p>
@@ -18579,7 +18579,7 @@
                             <a:schemeClr val="tx1"/>
                           </a:solidFill>
                         </a:rPr>
-                        <a:t>Liver iron not a strong OS factor (Armand 2014 meta-analysis)</a:t>
+                        <a:t>Liver iron not a strong OS factor (Armand 2014)</a:t>
                       </a:r>
                       <a:endParaRPr lang="en-US" sz="1600" dirty="0"/>
                     </a:p>
@@ -18892,16 +18892,16 @@
         </p:nvGraphicFramePr>
         <p:xfrm>
           <a:off x="685800" y="2240280"/>
-          <a:ext cx="10826496" cy="914400"/>
+          <a:ext cx="10817352" cy="914400"/>
         </p:xfrm>
         <a:graphic>
           <a:graphicData uri="http://schemas.openxmlformats.org/drawingml/2006/table">
             <a:tbl>
               <a:tblPr/>
               <a:tblGrid>
-                <a:gridCol w="2560320"/>
+                <a:gridCol w="2459736"/>
                 <a:gridCol w="4919472"/>
-                <a:gridCol w="3346704"/>
+                <a:gridCol w="3438144"/>
               </a:tblGrid>
               <a:tr h="0">
                 <a:tc>
@@ -19138,7 +19138,7 @@
                             <a:schemeClr val="tx1"/>
                           </a:solidFill>
                         </a:rPr>
-                        <a:t>Less FNHTR, HLA alloimmunisation, CMV</a:t>
+                        <a:t>Less FNHTR, alloimmunisation, CMV</a:t>
                       </a:r>
                       <a:endParaRPr lang="en-US" sz="1500" dirty="0"/>
                     </a:p>
@@ -22634,7 +22634,7 @@
                   <a:schemeClr val="tx1"/>
                 </a:solidFill>
               </a:rPr>
-              <a:t>Prophylaxis stays standard in allo-HCT</a:t>
+              <a:t>Allo-HCT: still prophylactic</a:t>
             </a:r>
             <a:endParaRPr lang="en-US" sz="1500" dirty="0"/>
           </a:p>
@@ -23216,7 +23216,7 @@
                             <a:schemeClr val="tx1"/>
                           </a:solidFill>
                         </a:rPr>
-                        <a:t>Therapeutic-only vs prophylactic PC, age ≥ 16</a:t>
+                        <a:t>Therapeutic-only vs prophylactic (≥ 16 y)</a:t>
                       </a:r>
                       <a:endParaRPr lang="en-US" sz="1500" dirty="0"/>
                     </a:p>
@@ -23744,7 +23744,7 @@
                             <a:schemeClr val="tx1"/>
                           </a:solidFill>
                         </a:rPr>
-                        <a:t>Equivalent; apheresis wins only with HLA/HPA Ab</a:t>
+                        <a:t>Equal; apheresis better only with HLA/HPA Ab</a:t>
                       </a:r>
                       <a:endParaRPr lang="en-US" sz="1500" dirty="0"/>
                     </a:p>
@@ -23783,7 +23783,7 @@
         </p:nvSpPr>
         <p:spPr>
           <a:xfrm>
-            <a:off x="685800" y="4754880"/>
+            <a:off x="685800" y="5257800"/>
             <a:ext cx="10817352" cy="411480"/>
           </a:xfrm>
           <a:prstGeom prst="rect">
@@ -24665,7 +24665,7 @@
                   <a:schemeClr val="tx1"/>
                 </a:solidFill>
               </a:rPr>
-              <a:t>Major</a:t>
+              <a:t>Major: patient's Ab</a:t>
             </a:r>
             <a:endParaRPr lang="en-US" sz="1400" dirty="0"/>
           </a:p>
@@ -24707,7 +24707,7 @@
                   <a:schemeClr val="tx1"/>
                 </a:solidFill>
               </a:rPr>
-              <a:t>Patient O, donor A: patient's anti-A</a:t>
+              <a:t>Patient O, donor A</a:t>
             </a:r>
             <a:endParaRPr lang="en-US" sz="1600" dirty="0"/>
           </a:p>
@@ -24835,7 +24835,7 @@
                   <a:schemeClr val="tx1"/>
                 </a:solidFill>
               </a:rPr>
-              <a:t>Minor</a:t>
+              <a:t>Minor: donor's Ab</a:t>
             </a:r>
             <a:endParaRPr lang="en-US" sz="1400" dirty="0"/>
           </a:p>
@@ -24877,7 +24877,7 @@
                   <a:schemeClr val="tx1"/>
                 </a:solidFill>
               </a:rPr>
-              <a:t>Patient A, donor O: donor's anti-A</a:t>
+              <a:t>Patient A, donor O</a:t>
             </a:r>
             <a:endParaRPr lang="en-US" sz="1600" dirty="0"/>
           </a:p>
@@ -24943,7 +24943,7 @@
                   <a:schemeClr val="tx1"/>
                 </a:solidFill>
               </a:rPr>
-              <a:t>Delayed haemolysis by donor B cells</a:t>
+              <a:t>Haemolysis from donor B lymphocytes</a:t>
             </a:r>
             <a:endParaRPr lang="en-US" sz="1500" dirty="0"/>
           </a:p>
@@ -25005,7 +25005,7 @@
                   <a:schemeClr val="tx1"/>
                 </a:solidFill>
               </a:rPr>
-              <a:t>Bidirectional</a:t>
+              <a:t>Bidirectional: both</a:t>
             </a:r>
             <a:endParaRPr lang="en-US" sz="1400" dirty="0"/>
           </a:p>
@@ -25047,7 +25047,7 @@
                   <a:schemeClr val="tx1"/>
                 </a:solidFill>
               </a:rPr>
-              <a:t>Patient A, donor B: both directions</a:t>
+              <a:t>Patient A, donor B</a:t>
             </a:r>
             <a:endParaRPr lang="en-US" sz="1600" dirty="0"/>
           </a:p>

--- a/slides/decks/s06-transfusion-abo.pptx
+++ b/slides/decks/s06-transfusion-abo.pptx
@@ -134,19 +134,19 @@
   <p:extLst>
     <p:ext uri="{521415D9-36F7-43E2-AB2F-B90AF26B5E84}">
       <p14:sectionLst xmlns:p14="http://schemas.microsoft.com/office/powerpoint/2010/main">
-        <p14:section name="Opening" id="{680e034a-d1e5-bcce-3577-53d232e74757}">
+        <p14:section name="Opening" id="{42fa5d08-cbb9-6205-841c-a1c0bcf105cc}">
           <p14:sldIdLst>
             <p14:sldId id="256"/>
             <p14:sldId id="257"/>
           </p14:sldIdLst>
         </p14:section>
-        <p14:section name="Safe products" id="{bfb23125-a588-3516-1c06-99398064c644}">
+        <p14:section name="Safe products" id="{0024c90e-fefd-f110-968c-a795fc23131e}">
           <p14:sldIdLst>
             <p14:sldId id="258"/>
             <p14:sldId id="259"/>
           </p14:sldIdLst>
         </p14:section>
-        <p14:section name="Red cells and platelets" id="{7ec79790-ebb9-7155-8084-ded657af89e4}">
+        <p14:section name="Red cells and platelets" id="{b8bc5f00-a5e5-5d93-bac9-12576a830aec}">
           <p14:sldIdLst>
             <p14:sldId id="260"/>
             <p14:sldId id="261"/>
@@ -154,7 +154,7 @@
             <p14:sldId id="263"/>
           </p14:sldIdLst>
         </p14:section>
-        <p14:section name="ABO-incompatible HCT" id="{f631fddc-d7af-b895-9b12-78942eb7c583}">
+        <p14:section name="ABO-incompatible HCT" id="{4cb28a8e-1a28-a530-0cc5-7591273f4246}">
           <p14:sldIdLst>
             <p14:sldId id="264"/>
             <p14:sldId id="265"/>
@@ -165,12 +165,12 @@
             <p14:sldId id="270"/>
           </p14:sldIdLst>
         </p14:section>
-        <p14:section name="Granulocytes" id="{c8c88a56-e4da-2ec6-33b7-8878b581d3aa}">
+        <p14:section name="Granulocytes" id="{f373621e-4d2b-f75a-c830-e0282254abcd}">
           <p14:sldIdLst>
             <p14:sldId id="271"/>
           </p14:sldIdLst>
         </p14:section>
-        <p14:section name="Board questions" id="{28761598-07bc-9631-b5ab-095bf3f6c322}">
+        <p14:section name="Board questions" id="{600c3706-64b8-7c7c-e98e-ebaea90cb412}">
           <p14:sldIdLst>
             <p14:sldId id="272"/>
             <p14:sldId id="273"/>
@@ -180,14 +180,14 @@
             <p14:sldId id="277"/>
           </p14:sldIdLst>
         </p14:section>
-        <p14:section name="References" id="{11027263-6ef1-4944-0788-73721e274a4b}">
+        <p14:section name="References" id="{e276d55f-ba85-8482-8d69-d080fff65463}">
           <p14:sldIdLst>
             <p14:sldId id="278"/>
             <p14:sldId id="279"/>
             <p14:sldId id="280"/>
           </p14:sldIdLst>
         </p14:section>
-        <p14:section name="Backup" id="{7ca3bec1-81ad-1c0e-b349-658ca57cf78f}">
+        <p14:section name="Backup" id="{bde3fb69-4aa4-5dd3-1722-8a8850306d79}">
           <p14:sldIdLst>
             <p14:sldId id="281"/>
             <p14:sldId id="282"/>
@@ -23378,7 +23378,7 @@
                             <a:schemeClr val="tx1"/>
                           </a:solidFill>
                         </a:rPr>
-                        <a:t>More bleeding in children, esp. auto-HCT</a:t>
+                        <a:t>More bleeding in children, mainly auto</a:t>
                       </a:r>
                       <a:endParaRPr lang="en-US" sz="1500" dirty="0"/>
                     </a:p>

--- a/slides/decks/s06-transfusion-abo.pptx
+++ b/slides/decks/s06-transfusion-abo.pptx
@@ -134,19 +134,19 @@
   <p:extLst>
     <p:ext uri="{521415D9-36F7-43E2-AB2F-B90AF26B5E84}">
       <p14:sectionLst xmlns:p14="http://schemas.microsoft.com/office/powerpoint/2010/main">
-        <p14:section name="Opening" id="{42fa5d08-cbb9-6205-841c-a1c0bcf105cc}">
+        <p14:section name="Opening" id="{7d4a9a9c-984f-bcc8-1b10-8191347d8135}">
           <p14:sldIdLst>
             <p14:sldId id="256"/>
             <p14:sldId id="257"/>
           </p14:sldIdLst>
         </p14:section>
-        <p14:section name="Safe products" id="{0024c90e-fefd-f110-968c-a795fc23131e}">
+        <p14:section name="Safe products" id="{d879bc16-493b-e927-7334-d1ff912b0481}">
           <p14:sldIdLst>
             <p14:sldId id="258"/>
             <p14:sldId id="259"/>
           </p14:sldIdLst>
         </p14:section>
-        <p14:section name="Red cells and platelets" id="{b8bc5f00-a5e5-5d93-bac9-12576a830aec}">
+        <p14:section name="Red cells and platelets" id="{f61a4736-5d38-bc35-9c0a-6eee471b9e24}">
           <p14:sldIdLst>
             <p14:sldId id="260"/>
             <p14:sldId id="261"/>
@@ -154,7 +154,7 @@
             <p14:sldId id="263"/>
           </p14:sldIdLst>
         </p14:section>
-        <p14:section name="ABO-incompatible HCT" id="{4cb28a8e-1a28-a530-0cc5-7591273f4246}">
+        <p14:section name="ABO-incompatible HCT" id="{92bb4bab-318e-7c04-96c2-3681c55e2e4f}">
           <p14:sldIdLst>
             <p14:sldId id="264"/>
             <p14:sldId id="265"/>
@@ -165,12 +165,12 @@
             <p14:sldId id="270"/>
           </p14:sldIdLst>
         </p14:section>
-        <p14:section name="Granulocytes" id="{f373621e-4d2b-f75a-c830-e0282254abcd}">
+        <p14:section name="Granulocytes" id="{b1e00cc6-ebf8-c5a1-ba90-b1a1234db960}">
           <p14:sldIdLst>
             <p14:sldId id="271"/>
           </p14:sldIdLst>
         </p14:section>
-        <p14:section name="Board questions" id="{600c3706-64b8-7c7c-e98e-ebaea90cb412}">
+        <p14:section name="Board questions" id="{c04c30c5-3dd8-40fd-b6b8-f38ab32c7891}">
           <p14:sldIdLst>
             <p14:sldId id="272"/>
             <p14:sldId id="273"/>
@@ -180,14 +180,14 @@
             <p14:sldId id="277"/>
           </p14:sldIdLst>
         </p14:section>
-        <p14:section name="References" id="{e276d55f-ba85-8482-8d69-d080fff65463}">
+        <p14:section name="References" id="{e7ad2f0d-4dc9-cd98-cbeb-111156058697}">
           <p14:sldIdLst>
             <p14:sldId id="278"/>
             <p14:sldId id="279"/>
             <p14:sldId id="280"/>
           </p14:sldIdLst>
         </p14:section>
-        <p14:section name="Backup" id="{bde3fb69-4aa4-5dd3-1722-8a8850306d79}">
+        <p14:section name="Backup" id="{a9c07bdc-b269-34a5-f1f6-90666c6ebf1e}">
           <p14:sldIdLst>
             <p14:sldId id="281"/>
             <p14:sldId id="282"/>
